--- a/curso_es/pptx/S79.pptx
+++ b/curso_es/pptx/S79.pptx
@@ -3904,7 +3904,7 @@
                 </a:solidFill>
                 <a:latin typeface="Nunito Sans"/>
               </a:rPr>
-              <a:t>Iker escribe a su novia Leire cada hora: «¿Dónde estás? ¿Con quién? Mándame la ubicación». Y añade: «Es porque me preocupo por ti». (Ejemplo inventado.)</a:t>
+              <a:t>Un chico escribe a su novia cada hora: «¿Dónde estás? ¿Con quién? Mándame la ubicación». Y añade: «Es porque me preocupo por ti». (Ejemplo inventado.)</a:t>
             </a:r>
           </a:p>
         </p:txBody>
@@ -3952,7 +3952,7 @@
                 </a:solidFill>
                 <a:latin typeface="Nunito Sans"/>
               </a:rPr>
-              <a:t>¿Qué dice Iker? Que es preocupación, cariño.</a:t>
+              <a:t>¿Qué dice el chico? Que es preocupación, cariño.</a:t>
             </a:r>
           </a:p>
           <a:p>
@@ -3977,7 +3977,7 @@
                 </a:solidFill>
                 <a:latin typeface="Nunito Sans"/>
               </a:rPr>
-              <a:t>¿Qué hace? Vigila dónde está Leire y con quién, a todas horas.</a:t>
+              <a:t>¿Qué hace? Vigila dónde está ella y con quién, a todas horas.</a:t>
             </a:r>
           </a:p>
           <a:p>
@@ -4231,7 +4231,7 @@
                 </a:solidFill>
                 <a:latin typeface="Nunito Sans"/>
               </a:rPr>
-              <a:t>Naiara ve que su novio Omar se ríe mucho con una compañera. Siente celos. (Ejemplo inventado.)</a:t>
+              <a:t>Una chica ve que su novio se ríe mucho con una compañera. Siente celos. (Ejemplo inventado.)</a:t>
             </a:r>
           </a:p>
         </p:txBody>
@@ -4304,7 +4304,7 @@
                 </a:solidFill>
                 <a:latin typeface="Nunito Sans"/>
               </a:rPr>
-              <a:t>Lo que Naiara haga con ellos es otra cosa: puede hablarlo con calma, o vigilar y prohibir.</a:t>
+              <a:t>Lo que ella haga con ellos es otra cosa: puede hablarlo con calma, o vigilar y prohibir.</a:t>
             </a:r>
           </a:p>
           <a:p>
@@ -5049,7 +5049,7 @@
                 </a:solidFill>
                 <a:latin typeface="Nunito Sans"/>
               </a:rPr>
-              <a:t>Yasmin y Chen llevan un año juntos. No se revisan el móvil ni se piden contraseñas. Maialen opina: «Eso es que no confían el uno en el otro».</a:t>
+              <a:t>Una chica y un chico llevan un año juntos. No se revisan el móvil ni se piden contraseñas. Una amiga opina: «Eso es que no confían el uno en el otro».</a:t>
             </a:r>
           </a:p>
         </p:txBody>
@@ -5097,7 +5097,7 @@
                 </a:solidFill>
                 <a:latin typeface="Nunito Sans"/>
               </a:rPr>
-              <a:t>¿Tiene razón Maialen?</a:t>
+              <a:t>¿Tiene razón esa amiga?</a:t>
             </a:r>
           </a:p>
           <a:p>
@@ -5190,7 +5190,7 @@
                 </a:solidFill>
                 <a:latin typeface="Nunito Sans"/>
               </a:rPr>
-              <a:t>¿Cómo lo sabe Maialen? Saca su conclusión de un dato que apunta a lo contrario. Y la intimidad es un derecho.</a:t>
+              <a:t>¿Cómo lo sabe? Saca su conclusión de un dato que apunta a lo contrario. Y la intimidad es un derecho.</a:t>
             </a:r>
           </a:p>
           <a:p>
